--- a/site/clases/parte-0-prerrequisitos/041-seaborn-distribuciones-relaciones-categoricas-facetas/clase-041-seaborn-distribuciones-relaciones-categoricas-facetas-presentacion.pptx
+++ b/site/clases/parte-0-prerrequisitos/041-seaborn-distribuciones-relaciones-categoricas-facetas/clase-041-seaborn-distribuciones-relaciones-categoricas-facetas-presentacion.pptx
@@ -3272,7 +3272,7 @@
                 </a:solidFill>
                 <a:latin typeface="Segoe UI"/>
               </a:rPr>
-              <a:t>Parte: 0 — Prerrequisitos · Fuente: VanderPlas, cap. 4 § 4.13 Visualization with Seaborn · seaborn docs. · Duración estimada: 75 min.</a:t>
+              <a:t>Parte: 0 — Prerrequisitos · Fuente: VanderPlas, cap. 4 § 4.13 Visualization with Seaborn · seaborn docs. · Duración estimada: 75 min. · Nivel: Básico</a:t>
             </a:r>
           </a:p>
         </p:txBody>
@@ -3581,7 +3581,7 @@
                 </a:solidFill>
                 <a:latin typeface="Segoe UI"/>
               </a:rPr>
-              <a:t>Parte: 0 — Prerrequisitos · Fuente: VanderPlas, cap. 4 § 4.13 Visualization with Seaborn · seaborn docs. · Duración estimada: 75 min.</a:t>
+              <a:t>Parte: 0 — Prerrequisitos · Fuente: VanderPlas, cap. 4 § 4.13 Visualization with Seaborn · seaborn docs. · Duración estimada: 75 min. · Nivel: Básico</a:t>
             </a:r>
           </a:p>
         </p:txBody>
